--- a/ML ASS 4 PENGUIN UML1.pptx
+++ b/ML ASS 4 PENGUIN UML1.pptx
@@ -7534,7 +7534,7 @@
           <a:p>
             <a:r>
               <a:rPr lang="en-US" dirty="0"/>
-              <a:t>Q/A</a:t>
+              <a:t>Justification</a:t>
             </a:r>
           </a:p>
         </p:txBody>
@@ -7631,14 +7631,14 @@
           <p:nvPr>
             <p:extLst>
               <p:ext uri="{D42A27DB-BD31-4B8C-83A1-F6EECF244321}">
-                <p14:modId xmlns:p14="http://schemas.microsoft.com/office/powerpoint/2010/main" val="698624118"/>
+                <p14:modId xmlns:p14="http://schemas.microsoft.com/office/powerpoint/2010/main" val="611923116"/>
               </p:ext>
             </p:extLst>
           </p:nvPr>
         </p:nvGraphicFramePr>
         <p:xfrm>
-          <a:off x="1602509" y="2132215"/>
-          <a:ext cx="8127999" cy="4434840"/>
+          <a:off x="914400" y="2132215"/>
+          <a:ext cx="10432473" cy="3611880"/>
         </p:xfrm>
         <a:graphic>
           <a:graphicData uri="http://schemas.openxmlformats.org/drawingml/2006/table">
@@ -7647,21 +7647,21 @@
                 <a:tableStyleId>{5C22544A-7EE6-4342-B048-85BDC9FD1C3A}</a:tableStyleId>
               </a:tblPr>
               <a:tblGrid>
-                <a:gridCol w="2709333">
+                <a:gridCol w="2286000">
                   <a:extLst>
                     <a:ext uri="{9D8B030D-6E8A-4147-A177-3AD203B41FA5}">
                       <a16:colId xmlns:a16="http://schemas.microsoft.com/office/drawing/2014/main" val="3803162807"/>
                     </a:ext>
                   </a:extLst>
                 </a:gridCol>
-                <a:gridCol w="2709333">
+                <a:gridCol w="4655127">
                   <a:extLst>
                     <a:ext uri="{9D8B030D-6E8A-4147-A177-3AD203B41FA5}">
                       <a16:colId xmlns:a16="http://schemas.microsoft.com/office/drawing/2014/main" val="1564622912"/>
                     </a:ext>
                   </a:extLst>
                 </a:gridCol>
-                <a:gridCol w="2709333">
+                <a:gridCol w="3491346">
                   <a:extLst>
                     <a:ext uri="{9D8B030D-6E8A-4147-A177-3AD203B41FA5}">
                       <a16:colId xmlns:a16="http://schemas.microsoft.com/office/drawing/2014/main" val="3483556582"/>
@@ -10748,19 +10748,7 @@
               <a:rPr lang="en-US" dirty="0">
                 <a:effectLst/>
               </a:rPr>
-              <a:t>The main aim of this project was to apply unsupervised learning (K-Means &amp;</a:t>
-            </a:r>
-            <a:r>
-              <a:rPr lang="en-US" dirty="0" err="1">
-                <a:effectLst/>
-              </a:rPr>
-              <a:t>dimentionality</a:t>
-            </a:r>
-            <a:r>
-              <a:rPr lang="en-US" dirty="0">
-                <a:effectLst/>
-              </a:rPr>
-              <a:t> reduction using  PCA) to the Palmer Penguins dataset to discover natural morphological groupings without using species labels.</a:t>
+              <a:t>The main aim of this project was to apply unsupervised learning (K-Means &amp;dimensionality reduction using  PCA) to the Palmer Penguins dataset to discover natural morphological groupings without using species labels.</a:t>
             </a:r>
           </a:p>
           <a:p>
@@ -10823,7 +10811,7 @@
               <a:rPr lang="en-US" dirty="0">
                 <a:effectLst/>
               </a:rPr>
-              <a:t>Average Silhouette Width = 0.61 which is reasonable</a:t>
+              <a:t>Average Silhouette Width = 0.446 which is reasonable</a:t>
             </a:r>
           </a:p>
           <a:p>
@@ -12009,7 +11997,21 @@
                 <a:effectLst/>
                 <a:latin typeface="quote-cjk-patch"/>
               </a:rPr>
-              <a:t>The silhouette analysis : the number of clusters were tested from 2 to 10 ,  the highest average silhouette width (0.61) achieved at k=3, indicating reasonable cluster structure.</a:t>
+              <a:t>The silhouette analysis : the number of clusters were tested from 2 to 10 ,  the highest average silhouette width </a:t>
+            </a:r>
+            <a:r>
+              <a:rPr lang="en-US" sz="2400" b="0" i="0">
+                <a:effectLst/>
+                <a:latin typeface="quote-cjk-patch"/>
+              </a:rPr>
+              <a:t>(0.45) </a:t>
+            </a:r>
+            <a:r>
+              <a:rPr lang="en-US" sz="2400" b="0" i="0" dirty="0">
+                <a:effectLst/>
+                <a:latin typeface="quote-cjk-patch"/>
+              </a:rPr>
+              <a:t>achieved at k=3, indicating reasonable cluster structure.</a:t>
             </a:r>
           </a:p>
           <a:p>
